--- a/apps/slides/tests/fixtures/pptx/synthetic/groups-and-connectors.pptx
+++ b/apps/slides/tests/fixtures/pptx/synthetic/groups-and-connectors.pptx
@@ -3199,6 +3199,97 @@
           </a:fontRef>
         </p:style>
       </p:cxnSp>
+      <p:grpSp>
+        <p:nvGrpSpPr>
+          <p:cNvPr id="5" name="Group 4"/>
+          <p:cNvGrpSpPr/>
+          <p:nvPr/>
+        </p:nvGrpSpPr>
+        <p:grpSpPr>
+          <a:xfrm>
+            <a:off x="4572000" y="3657600"/>
+            <a:ext cx="2743200" cy="914400"/>
+            <a:chOff x="914400" y="3657600"/>
+            <a:chExt cx="2286000" cy="914400"/>
+          </a:xfrm>
+        </p:grpSpPr>
+        <p:sp>
+          <p:nvSpPr>
+            <p:cNvPr id="6" name="Rectangle 5"/>
+            <p:cNvSpPr/>
+            <p:nvPr/>
+          </p:nvSpPr>
+          <p:spPr>
+            <a:xfrm>
+              <a:off x="914400" y="3657600"/>
+              <a:ext cx="914400" cy="914400"/>
+            </a:xfrm>
+            <a:prstGeom prst="rect">
+              <a:avLst/>
+            </a:prstGeom>
+          </p:spPr>
+          <p:style>
+            <a:lnRef idx="1">
+              <a:schemeClr val="accent1"/>
+            </a:lnRef>
+            <a:fillRef idx="3">
+              <a:schemeClr val="accent1"/>
+            </a:fillRef>
+            <a:effectRef idx="2">
+              <a:schemeClr val="accent1"/>
+            </a:effectRef>
+            <a:fontRef idx="minor">
+              <a:schemeClr val="lt1"/>
+            </a:fontRef>
+          </p:style>
+          <p:txBody>
+            <a:bodyPr rtlCol="0" anchor="ctr"/>
+            <a:lstStyle/>
+            <a:p>
+              <a:r>
+                <a:t>In a group</a:t>
+              </a:r>
+            </a:p>
+          </p:txBody>
+        </p:sp>
+        <p:sp>
+          <p:nvSpPr>
+            <p:cNvPr id="7" name="Oval 6"/>
+            <p:cNvSpPr/>
+            <p:nvPr/>
+          </p:nvSpPr>
+          <p:spPr>
+            <a:xfrm>
+              <a:off x="2286000" y="3657600"/>
+              <a:ext cx="914400" cy="914400"/>
+            </a:xfrm>
+            <a:prstGeom prst="ellipse">
+              <a:avLst/>
+            </a:prstGeom>
+          </p:spPr>
+          <p:style>
+            <a:lnRef idx="1">
+              <a:schemeClr val="accent1"/>
+            </a:lnRef>
+            <a:fillRef idx="3">
+              <a:schemeClr val="accent1"/>
+            </a:fillRef>
+            <a:effectRef idx="2">
+              <a:schemeClr val="accent1"/>
+            </a:effectRef>
+            <a:fontRef idx="minor">
+              <a:schemeClr val="lt1"/>
+            </a:fontRef>
+          </p:style>
+          <p:txBody>
+            <a:bodyPr rtlCol="0" anchor="ctr"/>
+            <a:lstStyle/>
+            <a:p>
+              <a:pPr algn="ctr"/>
+            </a:p>
+          </p:txBody>
+        </p:sp>
+      </p:grpSp>
     </p:spTree>
   </p:cSld>
   <p:clrMapOvr>
